--- a/docs/customer-documents/federal-aan-series/Vol_IX_Book_05_FedAAN_SaaS_Integration_Governance.pptx
+++ b/docs/customer-documents/federal-aan-series/Vol_IX_Book_05_FedAAN_SaaS_Integration_Governance.pptx
@@ -522,7 +522,7 @@
           <a:p/>
           <a:p>
             <a:r>
-              <a:t>Vendor sources: uiao repo: inbox/Application Aware Networking/servicenow-day2/saas-control-map.json</a:t>
+              <a:t>Vendor sources: host repo: docs/customer-documents/federal-aan-series/servicenow-day2/saas-control-map.json</a:t>
             </a:r>
           </a:p>
         </p:txBody>
@@ -738,13 +738,13 @@
           <a:lstStyle/>
           <a:p>
             <a:r>
-              <a:t>Explain the architectural choice: this book and its implementation now live together in Volume IX. The day-2 scoped app already carries the Graph-via-MID plumbing and the SoD pre-flight gate, and Lane E — app registration — is the same catalog grammar. Forking a second app to satisfy a volume label would duplicate the Script Includes, Flow, ATF harness and update set for one lane, which is exactly what Vol VII Book 05 warns against. Reuse wins; the cross-volume pointer is the price. Acknowledge it is a signal this book may architecturally belong in Volume IX. Book 05's own deployable, the x_ssa_fed_compliance skeleton, now exists on disk and is spine-registered — so the reuse decision here is about not duplicating plumbing, not about a missing alternative.</a:t>
+              <a:t>Explain the architectural choice: this book and its implementation now live together in Volume IX. The day-2 scoped app already carries the Graph-via-MID plumbing and the SoD pre-flight gate, and Lane E — app registration — is the same catalog grammar. Forking a second app to satisfy a volume label would duplicate the Script Includes, Flow, ATF harness and update set for one lane, which is exactly what Vol VII Book 05 warns against. Reuse wins; the cross-volume pointer is the price. Acknowledge it is a signal this book may architecturally belong in Volume IX. Book 05's own deployable, the x_fed_compliance skeleton, now exists on disk and is spine-registered — so the reuse decision here is about not duplicating plumbing, not about a missing alternative.</a:t>
             </a:r>
           </a:p>
           <a:p/>
           <a:p>
             <a:r>
-              <a:t>Vendor sources: uiao repo: inbox/Application Aware Networking/servicenow-day2/saas-control-map.json | https://learn.microsoft.com/graph/ | https://learn.microsoft.com/en-us/graph/api/resources/applicationtemplate</a:t>
+              <a:t>Vendor sources: host repo: docs/customer-documents/federal-aan-series/servicenow-day2/saas-control-map.json | https://learn.microsoft.com/graph/ | https://learn.microsoft.com/en-us/graph/api/resources/applicationtemplate</a:t>
             </a:r>
           </a:p>
         </p:txBody>
@@ -820,7 +820,7 @@
           <a:p/>
           <a:p>
             <a:r>
-              <a:t>Vendor sources: uiao repo: inbox/Application Aware Networking/servicenow-day2/saas-control-map.json</a:t>
+              <a:t>Vendor sources: host repo: docs/customer-documents/federal-aan-series/servicenow-day2/saas-control-map.json</a:t>
             </a:r>
           </a:p>
         </p:txBody>
@@ -972,7 +972,7 @@
           <a:p/>
           <a:p>
             <a:r>
-              <a:t>Vendor sources: uiao repo: inbox/entra-assessment/04-saas-integration-authorization/ | https://www.fedramp.gov/marketplace/</a:t>
+              <a:t>Vendor sources: host repo: inbox/entra-assessment/04-saas-integration-authorization/ | https://www.fedramp.gov/marketplace/</a:t>
             </a:r>
           </a:p>
         </p:txBody>
@@ -1048,7 +1048,7 @@
           <a:p/>
           <a:p>
             <a:r>
-              <a:t>Vendor sources: uiao repo: inbox/Application Aware Networking/servicenow-day2/saas-control-map.json</a:t>
+              <a:t>Vendor sources: host repo: docs/customer-documents/federal-aan-series/servicenow-day2/saas-control-map.json</a:t>
             </a:r>
           </a:p>
         </p:txBody>
@@ -1276,7 +1276,7 @@
           <a:p/>
           <a:p>
             <a:r>
-              <a:t>Vendor sources: https://www.fedramp.gov/marketplace/ | uiao repo: inbox/entra-assessment/04-saas-integration-authorization/</a:t>
+              <a:t>Vendor sources: https://www.fedramp.gov/marketplace/ | host repo: inbox/entra-assessment/04-saas-integration-authorization/</a:t>
             </a:r>
           </a:p>
         </p:txBody>
